--- a/project_reports/Week11_Progress.pptx
+++ b/project_reports/Week11_Progress.pptx
@@ -65,7 +65,7 @@
       <p:boldItalic r:id="rId43"/>
     </p:embeddedFont>
     <p:embeddedFont>
-      <p:font typeface="Source sans 3" panose="020B0303030403020204" pitchFamily="34" charset="0"/>
+      <p:font typeface="Source sans 3" panose="020B0303030403020204"/>
       <p:regular r:id="rId44"/>
       <p:bold r:id="rId45"/>
       <p:italic r:id="rId46"/>
@@ -315,7 +315,7 @@
           <a:p>
             <a:fld id="{81946028-ECFD-5C4B-8E7B-DD9207B52179}" type="datetimeFigureOut">
               <a:rPr lang="en-US" smtClean="0"/>
-              <a:t>4/10/26</a:t>
+              <a:t>4/11/26</a:t>
             </a:fld>
             <a:endParaRPr lang="en-US" dirty="0"/>
           </a:p>
@@ -496,7 +496,7 @@
           <a:p>
             <a:fld id="{1DDFAB82-E1E5-D84E-A45E-DAE72AA12B1D}" type="datetimeFigureOut">
               <a:rPr lang="en-US" smtClean="0"/>
-              <a:t>4/10/26</a:t>
+              <a:t>4/11/26</a:t>
             </a:fld>
             <a:endParaRPr lang="en-US" dirty="0"/>
           </a:p>
@@ -3169,921 +3169,8 @@
           <a:p>
             <a:r>
               <a:rPr lang="en-US" dirty="0"/>
-              <a:t>I used SHAP to understand what the model is actually learning. What I found is that the model is dominated by past population trends and structural variables, while disaster effects are inconsistent. This explains why short-term prediction is difficult, but structural patterns still emerge.</a:t>
-            </a:r>
-          </a:p>
-          <a:p>
-            <a:endParaRPr lang="en-US" dirty="0"/>
-          </a:p>
-          <a:p>
-            <a:r>
-              <a:rPr lang="en-US" dirty="0"/>
-              <a:t>SHAP shows consistent drivers </a:t>
-            </a:r>
-          </a:p>
-          <a:p>
-            <a:r>
-              <a:rPr lang="en-US" dirty="0"/>
-              <a:t>3-year target improves signal </a:t>
-            </a:r>
-          </a:p>
-          <a:p>
-            <a:r>
-              <a:rPr lang="en-US" dirty="0"/>
-              <a:t>spatial patterns are clear</a:t>
-            </a:r>
-          </a:p>
-          <a:p>
-            <a:endParaRPr lang="en-US" dirty="0"/>
-          </a:p>
-          <a:p>
-            <a:endParaRPr lang="en-US" dirty="0"/>
-          </a:p>
-          <a:p>
-            <a:endParaRPr lang="en-US" dirty="0"/>
-          </a:p>
-          <a:p>
-            <a:r>
-              <a:rPr lang="en-US" dirty="0"/>
-              <a:t>These two plots work together to explain both </a:t>
-            </a:r>
-            <a:r>
-              <a:rPr lang="en-US" b="1" dirty="0"/>
-              <a:t>what drives population change</a:t>
-            </a:r>
-            <a:r>
-              <a:rPr lang="en-US" dirty="0"/>
-              <a:t> and </a:t>
-            </a:r>
-            <a:r>
-              <a:rPr lang="en-US" b="1" dirty="0"/>
-              <a:t>when those drivers matter</a:t>
-            </a:r>
-            <a:r>
-              <a:rPr lang="en-US" dirty="0"/>
-              <a:t>.</a:t>
-            </a:r>
-          </a:p>
-          <a:p>
-            <a:r>
-              <a:rPr lang="en-US" dirty="0"/>
-              <a:t>On the right, the SHAP plot identifies the most important variables overall. We see that seismic activity, regional differences, and lagged population change are key drivers, which tells us that population dynamics are strongly influenced by structural conditions and persistence over time.</a:t>
-            </a:r>
-          </a:p>
-          <a:p>
-            <a:r>
-              <a:rPr lang="en-US" dirty="0"/>
-              <a:t>However, SHAP alone doesn’t tell us </a:t>
-            </a:r>
-            <a:r>
-              <a:rPr lang="en-US" i="1" dirty="0"/>
-              <a:t>when</a:t>
-            </a:r>
-            <a:r>
-              <a:rPr lang="en-US" dirty="0"/>
-              <a:t> these effects occur. That’s where the lead–lag analysis on the left comes in.</a:t>
-            </a:r>
-          </a:p>
-          <a:p>
-            <a:r>
-              <a:rPr lang="en-US" dirty="0"/>
-              <a:t>This plot shows that hurricane exposure is actually the most influential variable — but only at a one-year lag. In other words, the impact of hurricanes on population change is delayed, likely reflecting migration and recovery processes rather than immediate responses.</a:t>
-            </a:r>
-          </a:p>
-          <a:p>
-            <a:r>
-              <a:rPr lang="en-US" dirty="0"/>
-              <a:t>Seismic activity, by contrast, shows both immediate and short-term effects, while structural variables like vulnerability and income remain consistently important across time.</a:t>
-            </a:r>
-          </a:p>
-          <a:p>
-            <a:r>
-              <a:rPr lang="en-US" dirty="0"/>
-              <a:t>So together, these plots show that population change in Puerto Rico is not just driven by structural factors, but also by </a:t>
-            </a:r>
-            <a:r>
-              <a:rPr lang="en-US" b="1" dirty="0"/>
-              <a:t>delayed responses to shocks</a:t>
-            </a:r>
-            <a:r>
-              <a:rPr lang="en-US" dirty="0"/>
-              <a:t>, highlighting that timing plays a critical role in understanding demographic change.</a:t>
-            </a:r>
-          </a:p>
-          <a:p>
-            <a:endParaRPr lang="en-US" dirty="0"/>
-          </a:p>
-          <a:p>
-            <a:endParaRPr lang="en-US" dirty="0"/>
-          </a:p>
-          <a:p>
-            <a:endParaRPr lang="en-US" dirty="0"/>
-          </a:p>
-          <a:p>
-            <a:endParaRPr lang="en-US" dirty="0"/>
-          </a:p>
-          <a:p>
-            <a:endParaRPr lang="en-US" dirty="0"/>
-          </a:p>
-          <a:p>
-            <a:r>
-              <a:rPr lang="en-US" dirty="0"/>
-              <a:t>Those features were chosen because they capture </a:t>
-            </a:r>
-            <a:r>
-              <a:rPr lang="en-US" b="1" dirty="0"/>
-              <a:t>four fundamental mechanisms of population change</a:t>
-            </a:r>
-            <a:r>
-              <a:rPr lang="en-US" dirty="0"/>
-              <a:t>:</a:t>
-            </a:r>
-          </a:p>
-          <a:p>
-            <a:r>
-              <a:rPr lang="en-US" b="1" dirty="0"/>
-              <a:t>Persistence (momentum)</a:t>
-            </a:r>
-            <a:r>
-              <a:rPr lang="en-US" dirty="0"/>
-              <a:t> </a:t>
-            </a:r>
-          </a:p>
-          <a:p>
-            <a:r>
-              <a:rPr lang="en-US" b="1" dirty="0"/>
-              <a:t>Vulnerability (who is exposed)</a:t>
-            </a:r>
-            <a:r>
-              <a:rPr lang="en-US" dirty="0"/>
-              <a:t> </a:t>
-            </a:r>
-          </a:p>
-          <a:p>
-            <a:r>
-              <a:rPr lang="en-US" b="1" dirty="0"/>
-              <a:t>Shocks (what happens)</a:t>
-            </a:r>
-            <a:r>
-              <a:rPr lang="en-US" dirty="0"/>
-              <a:t> </a:t>
-            </a:r>
-          </a:p>
-          <a:p>
-            <a:r>
-              <a:rPr lang="en-US" b="1" dirty="0"/>
-              <a:t>Structure (where it happens)</a:t>
-            </a:r>
-          </a:p>
-          <a:p>
-            <a:endParaRPr lang="en-US" b="1" dirty="0"/>
-          </a:p>
-          <a:p>
-            <a:endParaRPr lang="en-US" b="1" dirty="0"/>
-          </a:p>
-          <a:p>
-            <a:r>
-              <a:rPr lang="en-US" dirty="0"/>
-              <a:t>The feature set is not random — it is </a:t>
-            </a:r>
-            <a:r>
-              <a:rPr lang="en-US" b="1" dirty="0"/>
-              <a:t>theory-driven + data-driven</a:t>
-            </a:r>
-            <a:r>
-              <a:rPr lang="en-US" dirty="0"/>
-              <a:t>.</a:t>
-            </a:r>
-          </a:p>
-          <a:p>
-            <a:endParaRPr lang="en-US" dirty="0"/>
-          </a:p>
-          <a:p>
-            <a:endParaRPr lang="en-US" dirty="0"/>
-          </a:p>
-          <a:p>
-            <a:endParaRPr lang="en-US" dirty="0"/>
-          </a:p>
-          <a:p>
-            <a:r>
-              <a:rPr lang="en-US" b="1" dirty="0"/>
-              <a:t>Features:</a:t>
-            </a:r>
-          </a:p>
-          <a:p>
-            <a:pPr lvl="1"/>
-            <a:r>
-              <a:rPr lang="en-US" sz="1200" kern="1200" dirty="0">
-                <a:solidFill>
-                  <a:schemeClr val="tx1"/>
-                </a:solidFill>
-                <a:latin typeface="+mn-lt"/>
-                <a:ea typeface="+mn-ea"/>
-                <a:cs typeface="+mn-cs"/>
-              </a:rPr>
-              <a:t>lag_pop_change_1</a:t>
-            </a:r>
-            <a:r>
-              <a:rPr lang="en-US" dirty="0"/>
-              <a:t> </a:t>
-            </a:r>
-          </a:p>
-          <a:p>
-            <a:pPr lvl="1"/>
-            <a:r>
-              <a:rPr lang="en-US" sz="1200" kern="1200" dirty="0">
-                <a:solidFill>
-                  <a:schemeClr val="tx1"/>
-                </a:solidFill>
-                <a:latin typeface="+mn-lt"/>
-                <a:ea typeface="+mn-ea"/>
-                <a:cs typeface="+mn-cs"/>
-              </a:rPr>
-              <a:t>lag_pop_change_2</a:t>
-            </a:r>
-            <a:r>
-              <a:rPr lang="en-US" dirty="0"/>
-              <a:t> </a:t>
-            </a:r>
-          </a:p>
-          <a:p>
-            <a:r>
-              <a:rPr lang="en-US" b="1" dirty="0"/>
-              <a:t>Why? </a:t>
-            </a:r>
-            <a:r>
-              <a:rPr lang="en-US" dirty="0"/>
-              <a:t>Population doesn’t change randomly, it follows trends.</a:t>
-            </a:r>
-          </a:p>
-          <a:p>
-            <a:r>
-              <a:rPr lang="en-US" dirty="0"/>
-              <a:t>decline → tends to continue declining </a:t>
-            </a:r>
-          </a:p>
-          <a:p>
-            <a:r>
-              <a:rPr lang="en-US" dirty="0"/>
-              <a:t>growth → tends to continue growing </a:t>
-            </a:r>
-          </a:p>
-          <a:p>
-            <a:r>
-              <a:rPr lang="en-US" b="1" dirty="0"/>
-              <a:t>Interpretation: </a:t>
-            </a:r>
-            <a:r>
-              <a:rPr lang="en-US" dirty="0"/>
-              <a:t>These variables capture </a:t>
-            </a:r>
-            <a:r>
-              <a:rPr lang="en-US" b="1" dirty="0"/>
-              <a:t>momentum and path dependence</a:t>
-            </a:r>
-          </a:p>
-          <a:p>
-            <a:endParaRPr lang="en-US" b="1" dirty="0"/>
-          </a:p>
-          <a:p>
-            <a:endParaRPr lang="en-US" b="1" dirty="0"/>
-          </a:p>
-          <a:p>
-            <a:r>
-              <a:rPr lang="en-US" b="1" dirty="0"/>
-              <a:t>Feature:</a:t>
-            </a:r>
-          </a:p>
-          <a:p>
-            <a:pPr lvl="1"/>
-            <a:r>
-              <a:rPr lang="en-US" sz="1200" kern="1200" dirty="0">
-                <a:solidFill>
-                  <a:schemeClr val="tx1"/>
-                </a:solidFill>
-                <a:latin typeface="+mn-lt"/>
-                <a:ea typeface="+mn-ea"/>
-                <a:cs typeface="+mn-cs"/>
-              </a:rPr>
-              <a:t>svi_pca_1</a:t>
-            </a:r>
-            <a:r>
-              <a:rPr lang="en-US" dirty="0"/>
-              <a:t> </a:t>
-            </a:r>
-          </a:p>
-          <a:p>
-            <a:r>
-              <a:rPr lang="en-US" b="1" dirty="0"/>
-              <a:t>Why? </a:t>
-            </a:r>
-            <a:r>
-              <a:rPr lang="en-US" dirty="0"/>
-              <a:t>Not all municipalities respond the same way to shocks.</a:t>
-            </a:r>
-          </a:p>
-          <a:p>
-            <a:r>
-              <a:rPr lang="en-US" dirty="0"/>
-              <a:t>SVI captures:</a:t>
-            </a:r>
-          </a:p>
-          <a:p>
-            <a:pPr lvl="1"/>
-            <a:r>
-              <a:rPr lang="en-US" dirty="0"/>
-              <a:t>poverty </a:t>
-            </a:r>
-          </a:p>
-          <a:p>
-            <a:pPr lvl="1"/>
-            <a:r>
-              <a:rPr lang="en-US" dirty="0"/>
-              <a:t>age structure </a:t>
-            </a:r>
-          </a:p>
-          <a:p>
-            <a:pPr lvl="1"/>
-            <a:r>
-              <a:rPr lang="en-US" dirty="0"/>
-              <a:t>housing conditions </a:t>
-            </a:r>
-          </a:p>
-          <a:p>
-            <a:pPr lvl="1"/>
-            <a:r>
-              <a:rPr lang="en-US" dirty="0"/>
-              <a:t>social disadvantage </a:t>
-            </a:r>
-          </a:p>
-          <a:p>
-            <a:r>
-              <a:rPr lang="en-US" b="1" dirty="0"/>
-              <a:t>Interpretation: </a:t>
-            </a:r>
-            <a:r>
-              <a:rPr lang="en-US" dirty="0"/>
-              <a:t>This measures </a:t>
-            </a:r>
-            <a:r>
-              <a:rPr lang="en-US" b="1" dirty="0"/>
-              <a:t>baseline resilience vs vulnerability</a:t>
-            </a:r>
-            <a:endParaRPr lang="en-US" dirty="0"/>
-          </a:p>
-          <a:p>
-            <a:endParaRPr lang="en-US" dirty="0"/>
-          </a:p>
-          <a:p>
-            <a:r>
-              <a:rPr lang="en-US" b="1" dirty="0"/>
-              <a:t>Features:</a:t>
-            </a:r>
-          </a:p>
-          <a:p>
-            <a:pPr lvl="1"/>
-            <a:r>
-              <a:rPr lang="en-US" sz="1200" kern="1200" dirty="0">
-                <a:solidFill>
-                  <a:schemeClr val="tx1"/>
-                </a:solidFill>
-                <a:latin typeface="+mn-lt"/>
-                <a:ea typeface="+mn-ea"/>
-                <a:cs typeface="+mn-cs"/>
-              </a:rPr>
-              <a:t>wind_3yr_sum</a:t>
-            </a:r>
-            <a:r>
-              <a:rPr lang="en-US" dirty="0"/>
-              <a:t> (hurricanes) </a:t>
-            </a:r>
-          </a:p>
-          <a:p>
-            <a:pPr lvl="1"/>
-            <a:r>
-              <a:rPr lang="en-US" sz="1200" kern="1200" dirty="0">
-                <a:solidFill>
-                  <a:schemeClr val="tx1"/>
-                </a:solidFill>
-                <a:latin typeface="+mn-lt"/>
-                <a:ea typeface="+mn-ea"/>
-                <a:cs typeface="+mn-cs"/>
-              </a:rPr>
-              <a:t>seismic_3yr_sum</a:t>
-            </a:r>
-            <a:r>
-              <a:rPr lang="en-US" dirty="0"/>
-              <a:t> (earthquakes) </a:t>
-            </a:r>
-          </a:p>
-          <a:p>
-            <a:r>
-              <a:rPr lang="en-US" b="1" dirty="0"/>
-              <a:t>Why? </a:t>
-            </a:r>
-            <a:r>
-              <a:rPr lang="en-US" dirty="0"/>
-              <a:t>Puerto Rico’s population is heavily influenced by disasters.</a:t>
-            </a:r>
-          </a:p>
-          <a:p>
-            <a:r>
-              <a:rPr lang="en-US" dirty="0"/>
-              <a:t>But not just events — you used:</a:t>
-            </a:r>
-          </a:p>
-          <a:p>
-            <a:r>
-              <a:rPr lang="en-US" b="1" dirty="0"/>
-              <a:t>3-year rolling exposure</a:t>
-            </a:r>
-            <a:r>
-              <a:rPr lang="en-US" dirty="0"/>
-              <a:t> </a:t>
-            </a:r>
-          </a:p>
-          <a:p>
-            <a:r>
-              <a:rPr lang="en-US" dirty="0"/>
-              <a:t>This is VERY important because it captures </a:t>
-            </a:r>
-            <a:r>
-              <a:rPr lang="en-US" b="1" dirty="0"/>
-              <a:t>cumulative stress</a:t>
-            </a:r>
-            <a:r>
-              <a:rPr lang="en-US" dirty="0"/>
-              <a:t>, not just single events</a:t>
-            </a:r>
-          </a:p>
-          <a:p>
-            <a:endParaRPr lang="en-US" dirty="0"/>
-          </a:p>
-          <a:p>
-            <a:endParaRPr lang="en-US" dirty="0"/>
-          </a:p>
-          <a:p>
-            <a:r>
-              <a:rPr lang="en-US" b="1" dirty="0"/>
-              <a:t>Features:</a:t>
-            </a:r>
-          </a:p>
-          <a:p>
-            <a:pPr lvl="1"/>
-            <a:r>
-              <a:rPr lang="en-US" sz="1200" kern="1200" dirty="0">
-                <a:solidFill>
-                  <a:schemeClr val="tx1"/>
-                </a:solidFill>
-                <a:latin typeface="+mn-lt"/>
-                <a:ea typeface="+mn-ea"/>
-                <a:cs typeface="+mn-cs"/>
-              </a:rPr>
-              <a:t>wind_3yr_x_svi</a:t>
-            </a:r>
-            <a:r>
-              <a:rPr lang="en-US" dirty="0"/>
-              <a:t> </a:t>
-            </a:r>
-          </a:p>
-          <a:p>
-            <a:pPr lvl="1"/>
-            <a:r>
-              <a:rPr lang="en-US" sz="1200" kern="1200" dirty="0">
-                <a:solidFill>
-                  <a:schemeClr val="tx1"/>
-                </a:solidFill>
-                <a:latin typeface="+mn-lt"/>
-                <a:ea typeface="+mn-ea"/>
-                <a:cs typeface="+mn-cs"/>
-              </a:rPr>
-              <a:t>seismic_3yr_x_svi</a:t>
-            </a:r>
-            <a:r>
-              <a:rPr lang="en-US" dirty="0"/>
-              <a:t> </a:t>
-            </a:r>
-          </a:p>
-          <a:p>
-            <a:r>
-              <a:rPr lang="en-US" b="1" dirty="0"/>
-              <a:t>Why? </a:t>
-            </a:r>
-            <a:r>
-              <a:rPr lang="en-US" dirty="0"/>
-              <a:t>Disasters don’t affect everyone equally.</a:t>
-            </a:r>
-          </a:p>
-          <a:p>
-            <a:r>
-              <a:rPr lang="en-US" dirty="0"/>
-              <a:t>Example:</a:t>
-            </a:r>
-          </a:p>
-          <a:p>
-            <a:pPr lvl="1"/>
-            <a:r>
-              <a:rPr lang="en-US" dirty="0"/>
-              <a:t>high-SVI area + hurricane → bigger impact </a:t>
-            </a:r>
-          </a:p>
-          <a:p>
-            <a:pPr lvl="1"/>
-            <a:r>
-              <a:rPr lang="en-US" dirty="0"/>
-              <a:t>low-SVI area + hurricane → smaller impact </a:t>
-            </a:r>
-          </a:p>
-          <a:p>
-            <a:r>
-              <a:rPr lang="en-US" b="1" dirty="0"/>
-              <a:t>Interpretation: </a:t>
-            </a:r>
-            <a:r>
-              <a:rPr lang="en-US" dirty="0"/>
-              <a:t>These features capture </a:t>
-            </a:r>
-            <a:r>
-              <a:rPr lang="en-US" b="1" dirty="0"/>
-              <a:t>heterogeneous effects</a:t>
-            </a:r>
-            <a:endParaRPr lang="en-US" dirty="0"/>
-          </a:p>
-          <a:p>
-            <a:endParaRPr lang="en-US" dirty="0"/>
-          </a:p>
-          <a:p>
-            <a:endParaRPr lang="en-US" dirty="0"/>
-          </a:p>
-          <a:p>
-            <a:r>
-              <a:rPr lang="en-US" b="1" dirty="0"/>
-              <a:t>Features: </a:t>
-            </a:r>
-            <a:r>
-              <a:rPr lang="en-US" dirty="0"/>
-              <a:t>Economic Structure</a:t>
-            </a:r>
-            <a:endParaRPr lang="en-US" b="1" dirty="0"/>
-          </a:p>
-          <a:p>
-            <a:pPr lvl="1"/>
-            <a:r>
-              <a:rPr lang="en-US" sz="1200" kern="1200" dirty="0" err="1">
-                <a:solidFill>
-                  <a:schemeClr val="tx1"/>
-                </a:solidFill>
-                <a:latin typeface="+mn-lt"/>
-                <a:ea typeface="+mn-ea"/>
-                <a:cs typeface="+mn-cs"/>
-              </a:rPr>
-              <a:t>income_growth</a:t>
-            </a:r>
-            <a:r>
-              <a:rPr lang="en-US" dirty="0"/>
-              <a:t> </a:t>
-            </a:r>
-          </a:p>
-          <a:p>
-            <a:pPr lvl="1"/>
-            <a:r>
-              <a:rPr lang="en-US" sz="1200" kern="1200" dirty="0" err="1">
-                <a:solidFill>
-                  <a:schemeClr val="tx1"/>
-                </a:solidFill>
-                <a:latin typeface="+mn-lt"/>
-                <a:ea typeface="+mn-ea"/>
-                <a:cs typeface="+mn-cs"/>
-              </a:rPr>
-              <a:t>establishment_growth</a:t>
-            </a:r>
-            <a:r>
-              <a:rPr lang="en-US" dirty="0"/>
-              <a:t> </a:t>
-            </a:r>
-          </a:p>
-          <a:p>
-            <a:r>
-              <a:rPr lang="en-US" b="1" dirty="0"/>
-              <a:t>Why? </a:t>
-            </a:r>
-            <a:r>
-              <a:rPr lang="en-US" dirty="0"/>
-              <a:t>Economic conditions influence:</a:t>
-            </a:r>
-          </a:p>
-          <a:p>
-            <a:pPr lvl="1"/>
-            <a:r>
-              <a:rPr lang="en-US" dirty="0"/>
-              <a:t>migration </a:t>
-            </a:r>
-          </a:p>
-          <a:p>
-            <a:pPr lvl="1"/>
-            <a:r>
-              <a:rPr lang="en-US" dirty="0"/>
-              <a:t>opportunity </a:t>
-            </a:r>
-          </a:p>
-          <a:p>
-            <a:r>
-              <a:rPr lang="en-US" dirty="0"/>
-              <a:t>	resilience </a:t>
-            </a:r>
-          </a:p>
-          <a:p>
-            <a:r>
-              <a:rPr lang="en-US" b="1" dirty="0"/>
-              <a:t>Interpretation: </a:t>
-            </a:r>
-            <a:r>
-              <a:rPr lang="en-US" dirty="0"/>
-              <a:t>These are </a:t>
-            </a:r>
-            <a:r>
-              <a:rPr lang="en-US" b="1" dirty="0"/>
-              <a:t>slow-moving structural drivers</a:t>
-            </a:r>
-          </a:p>
-          <a:p>
-            <a:endParaRPr lang="en-US" b="1" dirty="0"/>
-          </a:p>
-          <a:p>
-            <a:r>
-              <a:rPr lang="en-US" b="1" dirty="0"/>
-              <a:t>Feature: </a:t>
-            </a:r>
-            <a:r>
-              <a:rPr lang="en-US" dirty="0"/>
-              <a:t>Social Conditions</a:t>
-            </a:r>
-            <a:endParaRPr lang="en-US" b="1" dirty="0"/>
-          </a:p>
-          <a:p>
-            <a:r>
-              <a:rPr lang="en-US" sz="1200" kern="1200" dirty="0" err="1">
-                <a:solidFill>
-                  <a:schemeClr val="tx1"/>
-                </a:solidFill>
-                <a:latin typeface="+mn-lt"/>
-                <a:ea typeface="+mn-ea"/>
-                <a:cs typeface="+mn-cs"/>
-              </a:rPr>
-              <a:t>lag_total_crime_rate</a:t>
-            </a:r>
-            <a:r>
-              <a:rPr lang="en-US" dirty="0"/>
-              <a:t> </a:t>
-            </a:r>
-          </a:p>
-          <a:p>
-            <a:r>
-              <a:rPr lang="en-US" b="1" dirty="0"/>
-              <a:t>Why? </a:t>
-            </a:r>
-            <a:r>
-              <a:rPr lang="en-US" dirty="0"/>
-              <a:t>Crime affects:</a:t>
-            </a:r>
-          </a:p>
-          <a:p>
-            <a:pPr lvl="1"/>
-            <a:r>
-              <a:rPr lang="en-US" dirty="0"/>
-              <a:t>out-migration </a:t>
-            </a:r>
-          </a:p>
-          <a:p>
-            <a:pPr lvl="1"/>
-            <a:r>
-              <a:rPr lang="en-US" dirty="0"/>
-              <a:t>quality of life </a:t>
-            </a:r>
-          </a:p>
-          <a:p>
-            <a:r>
-              <a:rPr lang="en-US" dirty="0"/>
-              <a:t>And you used </a:t>
-            </a:r>
-            <a:r>
-              <a:rPr lang="en-US" b="1" dirty="0"/>
-              <a:t>lagged crime</a:t>
-            </a:r>
-            <a:r>
-              <a:rPr lang="en-US" dirty="0"/>
-              <a:t> → correct direction of causality</a:t>
-            </a:r>
-          </a:p>
-          <a:p>
-            <a:endParaRPr lang="en-US" dirty="0"/>
-          </a:p>
-          <a:p>
-            <a:endParaRPr lang="en-US" dirty="0"/>
-          </a:p>
-          <a:p>
-            <a:r>
-              <a:rPr lang="en-US" b="1" dirty="0"/>
-              <a:t>Features: </a:t>
-            </a:r>
-            <a:r>
-              <a:rPr lang="en-US" dirty="0"/>
-              <a:t>Spatial Structure</a:t>
-            </a:r>
-            <a:endParaRPr lang="en-US" b="1" dirty="0"/>
-          </a:p>
-          <a:p>
-            <a:pPr lvl="1"/>
-            <a:r>
-              <a:rPr lang="en-US" sz="1200" kern="1200" dirty="0">
-                <a:solidFill>
-                  <a:schemeClr val="tx1"/>
-                </a:solidFill>
-                <a:latin typeface="+mn-lt"/>
-                <a:ea typeface="+mn-ea"/>
-                <a:cs typeface="+mn-cs"/>
-              </a:rPr>
-              <a:t>region</a:t>
-            </a:r>
-            <a:r>
-              <a:rPr lang="en-US" dirty="0"/>
-              <a:t> </a:t>
-            </a:r>
-          </a:p>
-          <a:p>
-            <a:pPr lvl="1"/>
-            <a:r>
-              <a:rPr lang="en-US" sz="1200" kern="1200" dirty="0">
-                <a:solidFill>
-                  <a:schemeClr val="tx1"/>
-                </a:solidFill>
-                <a:latin typeface="+mn-lt"/>
-                <a:ea typeface="+mn-ea"/>
-                <a:cs typeface="+mn-cs"/>
-              </a:rPr>
-              <a:t>municipio</a:t>
-            </a:r>
-            <a:r>
-              <a:rPr lang="en-US" dirty="0"/>
-              <a:t> </a:t>
-            </a:r>
-          </a:p>
-          <a:p>
-            <a:r>
-              <a:rPr lang="en-US" b="1" dirty="0"/>
-              <a:t>Why? </a:t>
-            </a:r>
-            <a:r>
-              <a:rPr lang="en-US" dirty="0"/>
-              <a:t>Geography matters:</a:t>
-            </a:r>
-          </a:p>
-          <a:p>
-            <a:r>
-              <a:rPr lang="en-US" dirty="0"/>
-              <a:t>South ≠ Metro ≠ West </a:t>
-            </a:r>
-          </a:p>
-          <a:p>
-            <a:r>
-              <a:rPr lang="en-US" dirty="0"/>
-              <a:t>each has different: </a:t>
-            </a:r>
-          </a:p>
-          <a:p>
-            <a:pPr lvl="1"/>
-            <a:r>
-              <a:rPr lang="en-US" dirty="0"/>
-              <a:t>economy </a:t>
-            </a:r>
-          </a:p>
-          <a:p>
-            <a:pPr lvl="1"/>
-            <a:r>
-              <a:rPr lang="en-US" dirty="0"/>
-              <a:t>exposure </a:t>
-            </a:r>
-          </a:p>
-          <a:p>
-            <a:pPr lvl="1"/>
-            <a:r>
-              <a:rPr lang="en-US" dirty="0"/>
-              <a:t>demographics </a:t>
-            </a:r>
-          </a:p>
-          <a:p>
-            <a:r>
-              <a:rPr lang="en-US" b="1" dirty="0"/>
-              <a:t>Interpretation: </a:t>
-            </a:r>
-            <a:r>
-              <a:rPr lang="en-US" dirty="0"/>
-              <a:t>These capture </a:t>
-            </a:r>
-            <a:r>
-              <a:rPr lang="en-US" b="1" dirty="0"/>
-              <a:t>unobserved spatial differences</a:t>
-            </a:r>
-          </a:p>
-          <a:p>
-            <a:endParaRPr lang="en-US" b="1" dirty="0"/>
-          </a:p>
-          <a:p>
-            <a:r>
-              <a:rPr lang="en-US" b="1" dirty="0"/>
-              <a:t>Feature: </a:t>
-            </a:r>
-            <a:r>
-              <a:rPr lang="en-US" dirty="0"/>
-              <a:t>Time Trend</a:t>
-            </a:r>
-            <a:endParaRPr lang="en-US" b="1" dirty="0"/>
-          </a:p>
-          <a:p>
-            <a:r>
-              <a:rPr lang="en-US" sz="1200" kern="1200" dirty="0">
-                <a:solidFill>
-                  <a:schemeClr val="tx1"/>
-                </a:solidFill>
-                <a:latin typeface="+mn-lt"/>
-                <a:ea typeface="+mn-ea"/>
-                <a:cs typeface="+mn-cs"/>
-              </a:rPr>
-              <a:t>year</a:t>
-            </a:r>
-            <a:r>
-              <a:rPr lang="en-US" dirty="0"/>
-              <a:t> </a:t>
-            </a:r>
-          </a:p>
-          <a:p>
-            <a:r>
-              <a:rPr lang="en-US" b="1" dirty="0"/>
-              <a:t>Why? </a:t>
-            </a:r>
-            <a:r>
-              <a:rPr lang="en-US" dirty="0"/>
-              <a:t>Captures:</a:t>
-            </a:r>
-          </a:p>
-          <a:p>
-            <a:pPr lvl="1"/>
-            <a:r>
-              <a:rPr lang="en-US" dirty="0"/>
-              <a:t>macro trends </a:t>
-            </a:r>
-          </a:p>
-          <a:p>
-            <a:pPr lvl="1"/>
-            <a:r>
-              <a:rPr lang="en-US" dirty="0"/>
-              <a:t>policy changes </a:t>
-            </a:r>
-          </a:p>
-          <a:p>
-            <a:r>
-              <a:rPr lang="en-US" dirty="0"/>
-              <a:t>          overall island trajectory</a:t>
-            </a:r>
-          </a:p>
-          <a:p>
-            <a:endParaRPr lang="en-US" dirty="0"/>
-          </a:p>
-          <a:p>
-            <a:endParaRPr lang="en-US" dirty="0"/>
-          </a:p>
-          <a:p>
-            <a:r>
-              <a:rPr lang="en-US" dirty="0"/>
-              <a:t>The feature set was designed to capture the key mechanisms driving population change: temporal persistence, vulnerability, external shocks, and structural differences.</a:t>
-            </a:r>
-          </a:p>
-          <a:p>
-            <a:r>
-              <a:rPr lang="en-US" dirty="0"/>
-              <a:t>Lagged population variables capture momentum, SVI captures baseline vulnerability, disaster exposure variables represent external shocks, and interaction terms allow these shocks to vary by vulnerability.</a:t>
-            </a:r>
-          </a:p>
-          <a:p>
-            <a:r>
-              <a:rPr lang="en-US" dirty="0"/>
-              <a:t>Economic and social variables capture longer-term structural conditions, while regional indicators account for spatial heterogeneity. Together, this creates a balanced and interpretable model.</a:t>
-            </a:r>
-          </a:p>
-          <a:p>
-            <a:endParaRPr lang="en-US" dirty="0"/>
-          </a:p>
-          <a:p>
-            <a:endParaRPr lang="en-US" dirty="0"/>
-          </a:p>
-          <a:p>
-            <a:endParaRPr lang="en-US" dirty="0"/>
-          </a:p>
-          <a:p>
-            <a:endParaRPr lang="en-US" dirty="0"/>
-          </a:p>
-          <a:p>
-            <a:endParaRPr lang="en-US" dirty="0"/>
+              <a:t>The SHAP analysis indicates that population change is primarily driven by lagged population dynamics and temporal persistence. Disaster-related variables, including hurricanes, earthquakes, and social vulnerability indices, do not appear as dominant predictors. This suggests that their effects are indirectly embedded within lagged population changes rather than captured as independent contemporaneous features.</a:t>
+            </a:r>
           </a:p>
         </p:txBody>
       </p:sp>
@@ -4187,103 +3274,129 @@
           <a:p>
             <a:r>
               <a:rPr lang="en-US" dirty="0"/>
-              <a:t>This slide shows a lead–lag analysis, which helps us understand not just what matters, but when it matters.</a:t>
-            </a:r>
-          </a:p>
-          <a:p>
-            <a:r>
-              <a:rPr lang="en-US" dirty="0"/>
-              <a:t>The key result is that hurricane exposure has its strongest effect at a one-year lag, not immediately. This suggests that population responses—such as migration or displacement—occur after some delay.</a:t>
-            </a:r>
-          </a:p>
-          <a:p>
-            <a:r>
-              <a:rPr lang="en-US" dirty="0"/>
-              <a:t>Earthquake effects appear both immediate and slightly persistent, while structural factors like vulnerability remain important across multiple time periods.</a:t>
-            </a:r>
-          </a:p>
-          <a:p>
-            <a:r>
-              <a:rPr lang="en-US" dirty="0"/>
-              <a:t>Overall, this tells us that population change is not driven by instant shocks, but by delayed and evolving responses over time.</a:t>
+              <a:t>This slide looks at when different drivers actually matter over time.</a:t>
             </a:r>
           </a:p>
           <a:p>
             <a:endParaRPr lang="en-US" dirty="0"/>
           </a:p>
           <a:p>
+            <a:r>
+              <a:rPr lang="en-US" dirty="0"/>
+              <a:t>The key takeaway is that lagged population dynamics dominate across all horizons. </a:t>
+            </a:r>
+          </a:p>
+          <a:p>
+            <a:r>
+              <a:rPr lang="en-US" dirty="0"/>
+              <a:t>This means population change is highly persistent — what happened in the past strongly predicts the future.</a:t>
+            </a:r>
+          </a:p>
+          <a:p>
             <a:endParaRPr lang="en-US" dirty="0"/>
           </a:p>
           <a:p>
             <a:r>
               <a:rPr lang="en-US" dirty="0"/>
-              <a:t>These two plots work together to explain both </a:t>
-            </a:r>
-            <a:r>
-              <a:rPr lang="en-US" b="1" dirty="0"/>
-              <a:t>what drives population change</a:t>
-            </a:r>
-            <a:r>
-              <a:rPr lang="en-US" dirty="0"/>
-              <a:t> and </a:t>
-            </a:r>
-            <a:r>
-              <a:rPr lang="en-US" b="1" dirty="0"/>
-              <a:t>when those drivers matter</a:t>
-            </a:r>
-            <a:r>
-              <a:rPr lang="en-US" dirty="0"/>
-              <a:t>.</a:t>
-            </a:r>
-          </a:p>
-          <a:p>
-            <a:r>
-              <a:rPr lang="en-US" dirty="0"/>
-              <a:t>On the right, the SHAP plot identifies the most important variables overall. We see that seismic activity, regional differences, and lagged population change are key drivers, which tells us that population dynamics are strongly influenced by structural conditions and persistence over time.</a:t>
-            </a:r>
-          </a:p>
-          <a:p>
-            <a:r>
-              <a:rPr lang="en-US" dirty="0"/>
-              <a:t>However, SHAP alone doesn’t tell us </a:t>
-            </a:r>
-            <a:r>
-              <a:rPr lang="en-US" i="1" dirty="0"/>
-              <a:t>when</a:t>
-            </a:r>
-            <a:r>
-              <a:rPr lang="en-US" dirty="0"/>
-              <a:t> these effects occur. That’s where the lead–lag analysis on the left comes in.</a:t>
-            </a:r>
-          </a:p>
-          <a:p>
-            <a:r>
-              <a:rPr lang="en-US" dirty="0"/>
-              <a:t>This plot shows that hurricane exposure is actually the most influential variable — but only at a one-year lag. In other words, the impact of hurricanes on population change is delayed, likely reflecting migration and recovery processes rather than immediate responses.</a:t>
-            </a:r>
-          </a:p>
-          <a:p>
-            <a:r>
-              <a:rPr lang="en-US" dirty="0"/>
-              <a:t>Seismic activity, by contrast, shows both immediate and short-term effects, while structural variables like vulnerability and income remain consistently important across time.</a:t>
-            </a:r>
-          </a:p>
-          <a:p>
-            <a:r>
-              <a:rPr lang="en-US" dirty="0"/>
-              <a:t>So together, these plots show that population change in Puerto Rico is not just driven by structural factors, but also by </a:t>
-            </a:r>
-            <a:r>
-              <a:rPr lang="en-US" b="1" dirty="0"/>
-              <a:t>delayed responses to shocks</a:t>
-            </a:r>
-            <a:r>
-              <a:rPr lang="en-US" dirty="0"/>
-              <a:t>, highlighting that timing plays a critical role in understanding demographic change.</a:t>
+              <a:t>We tested whether disasters like hurricanes and earthquakes show up directly at different lags, </a:t>
+            </a:r>
+          </a:p>
+          <a:p>
+            <a:r>
+              <a:rPr lang="en-US" dirty="0"/>
+              <a:t>but they do not appear as strong standalone predictors.</a:t>
             </a:r>
           </a:p>
           <a:p>
             <a:endParaRPr lang="en-US" dirty="0"/>
+          </a:p>
+          <a:p>
+            <a:r>
+              <a:rPr lang="en-US" dirty="0"/>
+              <a:t>Instead, their effects are absorbed into lagged population variables. </a:t>
+            </a:r>
+          </a:p>
+          <a:p>
+            <a:r>
+              <a:rPr lang="en-US" dirty="0"/>
+              <a:t>In other words, shocks don’t show up immediately — they accumulate and persist over time.</a:t>
+            </a:r>
+          </a:p>
+          <a:p>
+            <a:endParaRPr lang="en-US" dirty="0"/>
+          </a:p>
+          <a:p>
+            <a:r>
+              <a:rPr lang="en-US" dirty="0"/>
+              <a:t>So migration responses are gradual rather than immediate.</a:t>
+            </a:r>
+          </a:p>
+          <a:p>
+            <a:endParaRPr lang="en-US" dirty="0"/>
+          </a:p>
+          <a:p>
+            <a:r>
+              <a:rPr lang="en-US" dirty="0"/>
+              <a:t>The main insight is that population change is driven by persistence, not isolated shocks.</a:t>
+            </a:r>
+          </a:p>
+          <a:p>
+            <a:r>
+              <a:rPr lang="en-US" dirty="0"/>
+              <a:t>This has important implications: policies should focus on long-term structural conditions, </a:t>
+            </a:r>
+          </a:p>
+          <a:p>
+            <a:r>
+              <a:rPr lang="en-US" dirty="0"/>
+              <a:t>not just short-term responses to disasters.</a:t>
+            </a:r>
+          </a:p>
+          <a:p>
+            <a:endParaRPr lang="en-US" dirty="0"/>
+          </a:p>
+          <a:p>
+            <a:endParaRPr lang="en-US" dirty="0"/>
+          </a:p>
+          <a:p>
+            <a:endParaRPr lang="en-US" dirty="0"/>
+          </a:p>
+          <a:p>
+            <a:endParaRPr lang="en-US" dirty="0"/>
+          </a:p>
+          <a:p>
+            <a:r>
+              <a:rPr lang="en-US" dirty="0"/>
+              <a:t>This slide looks at when different drivers matter over time.</a:t>
+            </a:r>
+            <a:br>
+              <a:rPr lang="en-US" dirty="0"/>
+            </a:br>
+            <a:r>
+              <a:rPr lang="en-US" dirty="0"/>
+              <a:t>What we find is that lagged population dominates — meaning population change is highly persistent.</a:t>
+            </a:r>
+            <a:br>
+              <a:rPr lang="en-US" dirty="0"/>
+            </a:br>
+            <a:r>
+              <a:rPr lang="en-US" dirty="0"/>
+              <a:t>Even though we include disaster variables, they don’t show up as strong direct predictors at any lag.</a:t>
+            </a:r>
+            <a:br>
+              <a:rPr lang="en-US" dirty="0"/>
+            </a:br>
+            <a:r>
+              <a:rPr lang="en-US" dirty="0"/>
+              <a:t>Instead, their effects are absorbed into past population changes, which means migration responses are gradual, not immediate.</a:t>
+            </a:r>
+            <a:br>
+              <a:rPr lang="en-US" dirty="0"/>
+            </a:br>
+            <a:r>
+              <a:rPr lang="en-US"/>
+              <a:t>So the key takeaway is that population dynamics are driven more by persistence than by isolated shocks.</a:t>
+            </a:r>
           </a:p>
           <a:p>
             <a:endParaRPr lang="en-US" dirty="0"/>
@@ -17677,7 +16790,7 @@
 </file>
 
 <file path=ppt/slides/slide3.xml><?xml version="1.0" encoding="utf-8"?>
-<p:sld xmlns:a="http://schemas.openxmlformats.org/drawingml/2006/main" xmlns:r="http://schemas.openxmlformats.org/officeDocument/2006/relationships" xmlns:p="http://schemas.openxmlformats.org/presentationml/2006/main" show="0">
+<p:sld xmlns:a="http://schemas.openxmlformats.org/drawingml/2006/main" xmlns:r="http://schemas.openxmlformats.org/officeDocument/2006/relationships" xmlns:p="http://schemas.openxmlformats.org/presentationml/2006/main">
   <p:cSld>
     <p:spTree>
       <p:nvGrpSpPr>
@@ -20320,7 +19433,7 @@
         <p:spPr>
           <a:xfrm>
             <a:off x="139613" y="1368962"/>
-            <a:ext cx="8603554" cy="4801314"/>
+            <a:ext cx="9897766" cy="4801314"/>
           </a:xfrm>
           <a:prstGeom prst="rect">
             <a:avLst/>
@@ -20360,15 +19473,25 @@
             </a:pPr>
             <a:r>
               <a:rPr lang="en-US" dirty="0"/>
-              <a:t>Selected </a:t>
-            </a:r>
-            <a:r>
-              <a:rPr lang="en-US" b="1" dirty="0"/>
-              <a:t>Extra Trees</a:t>
-            </a:r>
-            <a:r>
-              <a:rPr lang="en-US" dirty="0"/>
-              <a:t> for interpretability and stability </a:t>
+              <a:t>Compared OLS, Ridge, Lasso, Random Forest, </a:t>
+            </a:r>
+            <a:r>
+              <a:rPr lang="en-US" dirty="0" err="1"/>
+              <a:t>HistGradientBoosting</a:t>
+            </a:r>
+            <a:r>
+              <a:rPr lang="en-US" dirty="0"/>
+              <a:t>, and Extra Trees </a:t>
+            </a:r>
+          </a:p>
+          <a:p>
+            <a:pPr marL="742950" lvl="1" indent="-285750">
+              <a:buFont typeface="Arial" panose="020B0604020202020204" pitchFamily="34" charset="0"/>
+              <a:buChar char="•"/>
+            </a:pPr>
+            <a:r>
+              <a:rPr lang="en-US" dirty="0"/>
+              <a:t>Selected Lasso as the final model based on the strongest out-of-sample performance </a:t>
             </a:r>
           </a:p>
           <a:p>
@@ -20407,23 +19530,23 @@
             <a:endParaRPr lang="en-US" b="1" dirty="0"/>
           </a:p>
           <a:p>
+            <a:pPr marL="742950" lvl="1" indent="-285750">
+              <a:buFont typeface="Arial" panose="020B0604020202020204" pitchFamily="34" charset="0"/>
+              <a:buChar char="•"/>
+            </a:pPr>
+            <a:endParaRPr lang="en-US" b="1" dirty="0"/>
+          </a:p>
+          <a:p>
             <a:pPr lvl="1"/>
             <a:endParaRPr lang="en-US" b="1" dirty="0"/>
           </a:p>
           <a:p>
-            <a:pPr lvl="1"/>
             <a:endParaRPr lang="en-US" b="1" dirty="0"/>
           </a:p>
           <a:p>
-            <a:pPr lvl="1"/>
             <a:endParaRPr lang="en-US" b="1" dirty="0"/>
           </a:p>
           <a:p>
-            <a:pPr lvl="1"/>
-            <a:endParaRPr lang="en-US" b="1" dirty="0"/>
-          </a:p>
-          <a:p>
-            <a:pPr lvl="1"/>
             <a:endParaRPr lang="en-US" b="1" dirty="0"/>
           </a:p>
           <a:p>
@@ -20440,11 +19563,8 @@
             </a:r>
             <a:r>
               <a:rPr lang="en-US" dirty="0"/>
-              <a:t>Extra Trees</a:t>
-            </a:r>
-          </a:p>
-          <a:p>
-            <a:endParaRPr lang="en-US" dirty="0"/>
+              <a:t>Lasso</a:t>
+            </a:r>
           </a:p>
           <a:p>
             <a:pPr marL="285750" indent="-285750">
@@ -20457,17 +19577,22 @@
             </a:r>
             <a:r>
               <a:rPr lang="en-US" dirty="0"/>
-              <a:t>Test R² ≈ 0.23</a:t>
-            </a:r>
+              <a:t>Test R² ≈ </a:t>
+            </a:r>
+            <a:r>
+              <a:rPr lang="en-US" b="1" dirty="0"/>
+              <a:t>0.91</a:t>
+            </a:r>
+            <a:endParaRPr lang="en-US" dirty="0"/>
           </a:p>
         </p:txBody>
       </p:sp>
       <p:pic>
         <p:nvPicPr>
-          <p:cNvPr id="2" name="Picture 1">
+          <p:cNvPr id="6" name="Picture 5">
             <a:extLst>
               <a:ext uri="{FF2B5EF4-FFF2-40B4-BE49-F238E27FC236}">
-                <a16:creationId xmlns:a16="http://schemas.microsoft.com/office/drawing/2014/main" id="{6EB52DF2-EA38-43F1-211A-5C2C6307FD58}"/>
+                <a16:creationId xmlns:a16="http://schemas.microsoft.com/office/drawing/2014/main" id="{2F138C60-C22C-D590-D67D-5C4FCD08C9DC}"/>
               </a:ext>
             </a:extLst>
           </p:cNvPr>
@@ -20484,15 +19609,14 @@
               </a:ext>
             </a:extLst>
           </a:blip>
-          <a:srcRect t="8824"/>
           <a:stretch>
             <a:fillRect/>
           </a:stretch>
         </p:blipFill>
         <p:spPr>
           <a:xfrm>
-            <a:off x="741252" y="2588519"/>
-            <a:ext cx="5354748" cy="2362200"/>
+            <a:off x="630622" y="2722105"/>
+            <a:ext cx="6878993" cy="2670770"/>
           </a:xfrm>
           <a:prstGeom prst="rect">
             <a:avLst/>
@@ -20513,7 +19637,7 @@
 </file>
 
 <file path=ppt/slides/slide5.xml><?xml version="1.0" encoding="utf-8"?>
-<p:sld xmlns:a="http://schemas.openxmlformats.org/drawingml/2006/main" xmlns:r="http://schemas.openxmlformats.org/officeDocument/2006/relationships" xmlns:p="http://schemas.openxmlformats.org/presentationml/2006/main" show="0">
+<p:sld xmlns:a="http://schemas.openxmlformats.org/drawingml/2006/main" xmlns:r="http://schemas.openxmlformats.org/officeDocument/2006/relationships" xmlns:p="http://schemas.openxmlformats.org/presentationml/2006/main">
   <p:cSld>
     <p:spTree>
       <p:nvGrpSpPr>
@@ -20660,7 +19784,7 @@
         <p:spPr>
           <a:xfrm>
             <a:off x="139613" y="1368962"/>
-            <a:ext cx="9560053" cy="4924425"/>
+            <a:ext cx="9560053" cy="4770537"/>
           </a:xfrm>
           <a:prstGeom prst="rect">
             <a:avLst/>
@@ -20685,15 +19809,7 @@
             </a:pPr>
             <a:r>
               <a:rPr lang="en-US" sz="1600" dirty="0"/>
-              <a:t>Models don’t explain </a:t>
-            </a:r>
-            <a:r>
-              <a:rPr lang="en-US" sz="1600" i="1" dirty="0"/>
-              <a:t>why</a:t>
-            </a:r>
-            <a:r>
-              <a:rPr lang="en-US" sz="1600" dirty="0"/>
-              <a:t> predictions are made </a:t>
+              <a:t>Models don’t explain why predictions are made</a:t>
             </a:r>
           </a:p>
           <a:p>
@@ -20703,7 +19819,7 @@
             </a:pPr>
             <a:r>
               <a:rPr lang="en-US" sz="1600" dirty="0"/>
-              <a:t>SHAP reveals feature-level contributions </a:t>
+              <a:t>SHAP reveals feature-level contributions</a:t>
             </a:r>
           </a:p>
           <a:p>
@@ -20713,10 +19829,8 @@
             </a:pPr>
             <a:r>
               <a:rPr lang="en-US" sz="1600" dirty="0"/>
-              <a:t>Helps diagnose what the model is actually learning </a:t>
-            </a:r>
-          </a:p>
-          <a:p>
+              <a:t>Helps identify dominant drivers and hidden relationships</a:t>
+            </a:r>
             <a:br>
               <a:rPr lang="en-US" sz="1600" dirty="0"/>
             </a:br>
@@ -20781,107 +19895,80 @@
           <a:p>
             <a:r>
               <a:rPr lang="en-US" sz="1600" b="1" dirty="0"/>
-              <a:t>What the Model is Learning (Extra Trees)</a:t>
-            </a:r>
-          </a:p>
-          <a:p>
-            <a:pPr marL="285750" lvl="0" indent="-285750" eaLnBrk="0" fontAlgn="base" hangingPunct="0">
-              <a:spcBef>
-                <a:spcPct val="0"/>
-              </a:spcBef>
-              <a:spcAft>
-                <a:spcPct val="0"/>
-              </a:spcAft>
+              <a:t>What the Model is Learning (Lasso)</a:t>
+            </a:r>
+          </a:p>
+          <a:p>
+            <a:pPr marL="285750" indent="-285750">
               <a:buFont typeface="Arial" panose="020B0604020202020204" pitchFamily="34" charset="0"/>
               <a:buChar char="•"/>
             </a:pPr>
             <a:r>
-              <a:rPr lang="en-US" altLang="en-US" sz="1600" dirty="0">
-                <a:latin typeface="Arial" panose="020B0604020202020204" pitchFamily="34" charset="0"/>
-              </a:rPr>
-              <a:t>Past population change remains a strong driver </a:t>
-            </a:r>
-          </a:p>
-          <a:p>
-            <a:pPr marL="285750" lvl="0" indent="-285750" eaLnBrk="0" fontAlgn="base" hangingPunct="0">
-              <a:spcBef>
-                <a:spcPct val="0"/>
-              </a:spcBef>
-              <a:spcAft>
-                <a:spcPct val="0"/>
-              </a:spcAft>
+              <a:rPr lang="en-US" sz="1600" dirty="0"/>
+              <a:t>Past population change is the dominant driver (strong persistence)</a:t>
+            </a:r>
+          </a:p>
+          <a:p>
+            <a:pPr marL="285750" indent="-285750">
               <a:buFont typeface="Arial" panose="020B0604020202020204" pitchFamily="34" charset="0"/>
               <a:buChar char="•"/>
             </a:pPr>
             <a:r>
-              <a:rPr lang="en-US" altLang="en-US" sz="1600" dirty="0">
-                <a:latin typeface="Arial" panose="020B0604020202020204" pitchFamily="34" charset="0"/>
-              </a:rPr>
-              <a:t>Regional structure matters, especially South and East </a:t>
-            </a:r>
-          </a:p>
-          <a:p>
-            <a:pPr marL="285750" lvl="0" indent="-285750" eaLnBrk="0" fontAlgn="base" hangingPunct="0">
-              <a:spcBef>
-                <a:spcPct val="0"/>
-              </a:spcBef>
-              <a:spcAft>
-                <a:spcPct val="0"/>
-              </a:spcAft>
+              <a:rPr lang="en-US" sz="1600" dirty="0"/>
+              <a:t>Population dynamics are highly path-dependent over time</a:t>
+            </a:r>
+          </a:p>
+          <a:p>
+            <a:pPr marL="285750" indent="-285750">
               <a:buFont typeface="Arial" panose="020B0604020202020204" pitchFamily="34" charset="0"/>
               <a:buChar char="•"/>
             </a:pPr>
             <a:r>
-              <a:rPr lang="en-US" altLang="en-US" sz="1600" dirty="0">
-                <a:latin typeface="Arial" panose="020B0604020202020204" pitchFamily="34" charset="0"/>
-              </a:rPr>
-              <a:t>Earthquake and hurricane exposure contribute to predicted decline </a:t>
-            </a:r>
-          </a:p>
-          <a:p>
-            <a:pPr marL="285750" lvl="0" indent="-285750" eaLnBrk="0" fontAlgn="base" hangingPunct="0">
-              <a:spcBef>
-                <a:spcPct val="0"/>
-              </a:spcBef>
-              <a:spcAft>
-                <a:spcPct val="0"/>
-              </a:spcAft>
+              <a:rPr lang="en-US" sz="1600" dirty="0"/>
+              <a:t>Temporal trends (year) capture broader structural shifts</a:t>
+            </a:r>
+          </a:p>
+          <a:p>
+            <a:pPr marL="285750" indent="-285750">
               <a:buFont typeface="Arial" panose="020B0604020202020204" pitchFamily="34" charset="0"/>
               <a:buChar char="•"/>
             </a:pPr>
             <a:r>
-              <a:rPr lang="en-US" altLang="en-US" sz="1600" dirty="0">
-                <a:latin typeface="Arial" panose="020B0604020202020204" pitchFamily="34" charset="0"/>
-              </a:rPr>
-              <a:t>Economic activity helps explain resilience differences </a:t>
-            </a:r>
-          </a:p>
-          <a:p>
-            <a:pPr marL="285750" lvl="0" indent="-285750" eaLnBrk="0" fontAlgn="base" hangingPunct="0">
-              <a:spcBef>
-                <a:spcPct val="0"/>
-              </a:spcBef>
-              <a:spcAft>
-                <a:spcPct val="0"/>
-              </a:spcAft>
+              <a:rPr lang="en-US" sz="1600" dirty="0"/>
+              <a:t>Economic and demographic context provide secondary explanatory support</a:t>
+            </a:r>
+          </a:p>
+          <a:p>
+            <a:pPr marL="285750" indent="-285750">
               <a:buFont typeface="Arial" panose="020B0604020202020204" pitchFamily="34" charset="0"/>
               <a:buChar char="•"/>
             </a:pPr>
             <a:r>
-              <a:rPr lang="en-US" altLang="en-US" sz="1600" dirty="0">
-                <a:latin typeface="Arial" panose="020B0604020202020204" pitchFamily="34" charset="0"/>
-              </a:rPr>
-              <a:t>SVI matters, but mainly through interaction with hazard exposure</a:t>
-            </a:r>
+              <a:rPr lang="en-US" sz="1600" dirty="0"/>
+              <a:t>Disaster variables do not appear as strong direct predictors</a:t>
+            </a:r>
+          </a:p>
+          <a:p>
+            <a:pPr marL="285750" indent="-285750">
+              <a:buFont typeface="Arial" panose="020B0604020202020204" pitchFamily="34" charset="0"/>
+              <a:buChar char="•"/>
+            </a:pPr>
+            <a:r>
+              <a:rPr lang="en-US" sz="1600" dirty="0"/>
+              <a:t>Their effects are indirectly captured through lagged population changes</a:t>
+            </a:r>
+            <a:endParaRPr lang="en-US" altLang="en-US" sz="1600" dirty="0">
+              <a:latin typeface="Arial" panose="020B0604020202020204" pitchFamily="34" charset="0"/>
+            </a:endParaRPr>
           </a:p>
         </p:txBody>
       </p:sp>
       <p:pic>
         <p:nvPicPr>
-          <p:cNvPr id="7" name="Picture 6">
+          <p:cNvPr id="6" name="Picture 5">
             <a:extLst>
               <a:ext uri="{FF2B5EF4-FFF2-40B4-BE49-F238E27FC236}">
-                <a16:creationId xmlns:a16="http://schemas.microsoft.com/office/drawing/2014/main" id="{1A14832B-2233-18AA-1FCD-52373EA7A3A5}"/>
+                <a16:creationId xmlns:a16="http://schemas.microsoft.com/office/drawing/2014/main" id="{8B2A31DC-50D7-1A00-EFBA-2067FF059C1C}"/>
               </a:ext>
             </a:extLst>
           </p:cNvPr>
@@ -20904,80 +19991,8 @@
         </p:blipFill>
         <p:spPr>
           <a:xfrm>
-            <a:off x="13752025" y="0"/>
-            <a:ext cx="7213600" cy="5651500"/>
-          </a:xfrm>
-          <a:prstGeom prst="rect">
-            <a:avLst/>
-          </a:prstGeom>
-        </p:spPr>
-      </p:pic>
-      <p:pic>
-        <p:nvPicPr>
-          <p:cNvPr id="9" name="Picture 8">
-            <a:extLst>
-              <a:ext uri="{FF2B5EF4-FFF2-40B4-BE49-F238E27FC236}">
-                <a16:creationId xmlns:a16="http://schemas.microsoft.com/office/drawing/2014/main" id="{17DE12DD-53ED-F2B3-D547-41083C59BB05}"/>
-              </a:ext>
-            </a:extLst>
-          </p:cNvPr>
-          <p:cNvPicPr>
-            <a:picLocks noChangeAspect="1"/>
-          </p:cNvPicPr>
-          <p:nvPr/>
-        </p:nvPicPr>
-        <p:blipFill>
-          <a:blip r:embed="rId4">
-            <a:extLst>
-              <a:ext uri="{28A0092B-C50C-407E-A947-70E740481C1C}">
-                <a14:useLocalDpi xmlns:a14="http://schemas.microsoft.com/office/drawing/2010/main" val="0"/>
-              </a:ext>
-            </a:extLst>
-          </a:blip>
-          <a:stretch>
-            <a:fillRect/>
-          </a:stretch>
-        </p:blipFill>
-        <p:spPr>
-          <a:xfrm>
-            <a:off x="6692348" y="1433809"/>
-            <a:ext cx="5259321" cy="4184836"/>
-          </a:xfrm>
-          <a:prstGeom prst="rect">
-            <a:avLst/>
-          </a:prstGeom>
-        </p:spPr>
-      </p:pic>
-      <p:pic>
-        <p:nvPicPr>
-          <p:cNvPr id="3" name="Picture 2">
-            <a:extLst>
-              <a:ext uri="{FF2B5EF4-FFF2-40B4-BE49-F238E27FC236}">
-                <a16:creationId xmlns:a16="http://schemas.microsoft.com/office/drawing/2014/main" id="{B4FEE57B-D290-3316-4108-E243EE354AEA}"/>
-              </a:ext>
-            </a:extLst>
-          </p:cNvPr>
-          <p:cNvPicPr>
-            <a:picLocks noChangeAspect="1"/>
-          </p:cNvPicPr>
-          <p:nvPr/>
-        </p:nvPicPr>
-        <p:blipFill>
-          <a:blip r:embed="rId5">
-            <a:extLst>
-              <a:ext uri="{28A0092B-C50C-407E-A947-70E740481C1C}">
-                <a14:useLocalDpi xmlns:a14="http://schemas.microsoft.com/office/drawing/2010/main" val="0"/>
-              </a:ext>
-            </a:extLst>
-          </a:blip>
-          <a:stretch>
-            <a:fillRect/>
-          </a:stretch>
-        </p:blipFill>
-        <p:spPr>
-          <a:xfrm>
-            <a:off x="13752025" y="6293387"/>
-            <a:ext cx="5259321" cy="3192266"/>
+            <a:off x="7397685" y="1442543"/>
+            <a:ext cx="4447312" cy="4635795"/>
           </a:xfrm>
           <a:prstGeom prst="rect">
             <a:avLst/>
@@ -21175,46 +20190,54 @@
             </a:r>
           </a:p>
           <a:p>
-            <a:pPr marL="342900" indent="-342900">
+            <a:pPr marL="285750" indent="-285750">
               <a:buFont typeface="Arial" panose="020B0604020202020204" pitchFamily="34" charset="0"/>
               <a:buChar char="•"/>
             </a:pPr>
             <a:r>
               <a:rPr lang="en-US" sz="1600" dirty="0"/>
-              <a:t>Hurricanes (wind exposure) have the strongest impact at lag 1 </a:t>
-            </a:r>
-          </a:p>
-          <a:p>
-            <a:pPr marL="342900" indent="-342900">
+              <a:t>Lagged population dynamics dominate across all time horizons</a:t>
+            </a:r>
+          </a:p>
+          <a:p>
+            <a:pPr marL="285750" indent="-285750">
               <a:buFont typeface="Arial" panose="020B0604020202020204" pitchFamily="34" charset="0"/>
               <a:buChar char="•"/>
             </a:pPr>
             <a:r>
               <a:rPr lang="en-US" sz="1600" dirty="0"/>
-              <a:t>Earthquake effects are both immediate and short-term persistent </a:t>
-            </a:r>
-          </a:p>
-          <a:p>
-            <a:pPr marL="342900" indent="-342900">
+              <a:t>Population change exhibits strong persistence (momentum effect)</a:t>
+            </a:r>
+          </a:p>
+          <a:p>
+            <a:pPr marL="285750" indent="-285750">
               <a:buFont typeface="Arial" panose="020B0604020202020204" pitchFamily="34" charset="0"/>
               <a:buChar char="•"/>
             </a:pPr>
             <a:r>
               <a:rPr lang="en-US" sz="1600" dirty="0"/>
-              <a:t>Vulnerability (SVI) influences population change consistently over time </a:t>
-            </a:r>
-          </a:p>
-          <a:p>
-            <a:pPr marL="342900" indent="-342900">
+              <a:t>Time trend captures broader structural shifts over time</a:t>
+            </a:r>
+          </a:p>
+          <a:p>
+            <a:pPr marL="285750" indent="-285750">
               <a:buFont typeface="Arial" panose="020B0604020202020204" pitchFamily="34" charset="0"/>
               <a:buChar char="•"/>
             </a:pPr>
             <a:r>
               <a:rPr lang="en-US" sz="1600" dirty="0"/>
-              <a:t>Economic variables contribute modest but stable effects </a:t>
-            </a:r>
-          </a:p>
-          <a:p>
+              <a:t>Economic and demographic variables provide secondary support</a:t>
+            </a:r>
+          </a:p>
+          <a:p>
+            <a:pPr marL="285750" indent="-285750">
+              <a:buFont typeface="Arial" panose="020B0604020202020204" pitchFamily="34" charset="0"/>
+              <a:buChar char="•"/>
+            </a:pPr>
+            <a:r>
+              <a:rPr lang="en-US" sz="1600" dirty="0"/>
+              <a:t>Disaster variables show limited direct importance across lags</a:t>
+            </a:r>
             <a:br>
               <a:rPr lang="en-US" sz="1600" dirty="0"/>
             </a:br>
@@ -21230,36 +20253,44 @@
             </a:r>
           </a:p>
           <a:p>
-            <a:pPr marL="342900" indent="-342900">
+            <a:pPr marL="285750" indent="-285750">
               <a:buFont typeface="Arial" panose="020B0604020202020204" pitchFamily="34" charset="0"/>
               <a:buChar char="•"/>
             </a:pPr>
             <a:r>
               <a:rPr lang="en-US" sz="1600" dirty="0"/>
-              <a:t>Population responses to disasters are delayed, not immediate </a:t>
-            </a:r>
-          </a:p>
-          <a:p>
-            <a:pPr marL="342900" indent="-342900">
+              <a:t>Population dynamics are highly path-dependent</a:t>
+            </a:r>
+          </a:p>
+          <a:p>
+            <a:pPr marL="285750" indent="-285750">
               <a:buFont typeface="Arial" panose="020B0604020202020204" pitchFamily="34" charset="0"/>
               <a:buChar char="•"/>
             </a:pPr>
             <a:r>
               <a:rPr lang="en-US" sz="1600" dirty="0"/>
-              <a:t>Migration and recovery processes likely drive lagged effects </a:t>
-            </a:r>
-          </a:p>
-          <a:p>
-            <a:pPr marL="342900" indent="-342900">
+              <a:t>Migration responses unfold gradually rather than immediately</a:t>
+            </a:r>
+          </a:p>
+          <a:p>
+            <a:pPr marL="285750" indent="-285750">
               <a:buFont typeface="Arial" panose="020B0604020202020204" pitchFamily="34" charset="0"/>
               <a:buChar char="•"/>
             </a:pPr>
             <a:r>
               <a:rPr lang="en-US" sz="1600" dirty="0"/>
-              <a:t>Structural factors shape baseline vulnerability across time </a:t>
-            </a:r>
-          </a:p>
-          <a:p>
+              <a:t>Lagged population absorbs the cumulative effects of shocks</a:t>
+            </a:r>
+          </a:p>
+          <a:p>
+            <a:pPr marL="285750" indent="-285750">
+              <a:buFont typeface="Arial" panose="020B0604020202020204" pitchFamily="34" charset="0"/>
+              <a:buChar char="•"/>
+            </a:pPr>
+            <a:r>
+              <a:rPr lang="en-US" sz="1600" dirty="0"/>
+              <a:t>Disaster impacts are not immediate standalone drivers</a:t>
+            </a:r>
             <a:br>
               <a:rPr lang="en-US" sz="1600" dirty="0"/>
             </a:br>
@@ -21275,29 +20306,38 @@
             </a:r>
             <a:r>
               <a:rPr lang="en-US" sz="1600" dirty="0"/>
-              <a:t>Timing matters — not just magnitude</a:t>
-            </a:r>
-            <a:br>
+              <a:t>Population change is driven by persistence, not isolated shocks</a:t>
+            </a:r>
+            <a:endParaRPr lang="en-US" sz="1600" b="1" dirty="0"/>
+          </a:p>
+          <a:p>
+            <a:pPr marL="285750" indent="-285750">
+              <a:buFont typeface="Arial" panose="020B0604020202020204" pitchFamily="34" charset="0"/>
+              <a:buChar char="•"/>
+            </a:pPr>
+            <a:r>
               <a:rPr lang="en-US" sz="1600" dirty="0"/>
-            </a:br>
+              <a:t>Shocks matter — but only through their long-term effects</a:t>
+            </a:r>
+          </a:p>
+          <a:p>
+            <a:pPr marL="285750" indent="-285750">
+              <a:buFont typeface="Arial" panose="020B0604020202020204" pitchFamily="34" charset="0"/>
+              <a:buChar char="•"/>
+            </a:pPr>
             <a:r>
               <a:rPr lang="en-US" sz="1600" dirty="0"/>
-              <a:t>Population change is driven by </a:t>
-            </a:r>
-            <a:r>
-              <a:rPr lang="en-US" sz="1600" b="1" dirty="0"/>
-              <a:t>delayed responses to shocks and persistent structural conditions</a:t>
-            </a:r>
-            <a:endParaRPr lang="en-US" sz="1600" dirty="0"/>
+              <a:t>Migration dynamics reflect accumulated history, not single events</a:t>
+            </a:r>
           </a:p>
         </p:txBody>
       </p:sp>
       <p:pic>
         <p:nvPicPr>
-          <p:cNvPr id="3" name="Picture 2">
+          <p:cNvPr id="6" name="Picture 5">
             <a:extLst>
               <a:ext uri="{FF2B5EF4-FFF2-40B4-BE49-F238E27FC236}">
-                <a16:creationId xmlns:a16="http://schemas.microsoft.com/office/drawing/2014/main" id="{C1FD42D7-76D3-259B-08F9-14DCC8C5626D}"/>
+                <a16:creationId xmlns:a16="http://schemas.microsoft.com/office/drawing/2014/main" id="{4C0A5257-3ED7-BCB5-16B5-91225047CD21}"/>
               </a:ext>
             </a:extLst>
           </p:cNvPr>
@@ -21320,8 +20360,8 @@
         </p:blipFill>
         <p:spPr>
           <a:xfrm>
-            <a:off x="6637304" y="2444000"/>
-            <a:ext cx="5415083" cy="3757094"/>
+            <a:off x="7199289" y="2668842"/>
+            <a:ext cx="4853097" cy="3366198"/>
           </a:xfrm>
           <a:prstGeom prst="rect">
             <a:avLst/>
@@ -23073,6 +22113,23 @@
 </file>
 
 <file path=customXml/item1.xml><?xml version="1.0" encoding="utf-8"?>
+<?mso-contentType ?>
+<FormTemplates xmlns="http://schemas.microsoft.com/sharepoint/v3/contenttype/forms">
+  <Display>DocumentLibraryForm</Display>
+  <Edit>DocumentLibraryForm</Edit>
+  <New>DocumentLibraryForm</New>
+</FormTemplates>
+</file>
+
+<file path=customXml/item2.xml><?xml version="1.0" encoding="utf-8"?>
+<p:properties xmlns:p="http://schemas.microsoft.com/office/2006/metadata/properties" xmlns:xsi="http://www.w3.org/2001/XMLSchema-instance" xmlns:pc="http://schemas.microsoft.com/office/infopath/2007/PartnerControls">
+  <documentManagement>
+    <_activity xmlns="11e45801-bee2-4eee-abb6-7fc01a896634" xsi:nil="true"/>
+  </documentManagement>
+</p:properties>
+</file>
+
+<file path=customXml/item3.xml><?xml version="1.0" encoding="utf-8"?>
 <ct:contentTypeSchema xmlns:ct="http://schemas.microsoft.com/office/2006/metadata/contentType" xmlns:ma="http://schemas.microsoft.com/office/2006/metadata/properties/metaAttributes" ct:_="" ma:_="" ma:contentTypeName="Document" ma:contentTypeID="0x01010015021A5DC4BEF54E90B3A7E0D30B82FD" ma:contentTypeVersion="5" ma:contentTypeDescription="Create a new document." ma:contentTypeScope="" ma:versionID="0b09cb170d6a15113edb6f479f6ecd10">
   <xsd:schema xmlns:xsd="http://www.w3.org/2001/XMLSchema" xmlns:xs="http://www.w3.org/2001/XMLSchema" xmlns:p="http://schemas.microsoft.com/office/2006/metadata/properties" xmlns:ns3="11e45801-bee2-4eee-abb6-7fc01a896634" targetNamespace="http://schemas.microsoft.com/office/2006/metadata/properties" ma:root="true" ma:fieldsID="c9b1b393770a16940206f9bb69539431" ns3:_="">
     <xsd:import namespace="11e45801-bee2-4eee-abb6-7fc01a896634"/>
@@ -23222,24 +22279,31 @@
 </ct:contentTypeSchema>
 </file>
 
-<file path=customXml/item2.xml><?xml version="1.0" encoding="utf-8"?>
-<?mso-contentType ?>
-<FormTemplates xmlns="http://schemas.microsoft.com/sharepoint/v3/contenttype/forms">
-  <Display>DocumentLibraryForm</Display>
-  <Edit>DocumentLibraryForm</Edit>
-  <New>DocumentLibraryForm</New>
-</FormTemplates>
+<file path=customXml/itemProps1.xml><?xml version="1.0" encoding="utf-8"?>
+<ds:datastoreItem xmlns:ds="http://schemas.openxmlformats.org/officeDocument/2006/customXml" ds:itemID="{B94EBF72-05B3-4092-B058-100DE54983B2}">
+  <ds:schemaRefs>
+    <ds:schemaRef ds:uri="http://schemas.microsoft.com/sharepoint/v3/contenttype/forms"/>
+  </ds:schemaRefs>
+</ds:datastoreItem>
 </file>
 
-<file path=customXml/item3.xml><?xml version="1.0" encoding="utf-8"?>
-<p:properties xmlns:p="http://schemas.microsoft.com/office/2006/metadata/properties" xmlns:xsi="http://www.w3.org/2001/XMLSchema-instance" xmlns:pc="http://schemas.microsoft.com/office/infopath/2007/PartnerControls">
-  <documentManagement>
-    <_activity xmlns="11e45801-bee2-4eee-abb6-7fc01a896634" xsi:nil="true"/>
-  </documentManagement>
-</p:properties>
+<file path=customXml/itemProps2.xml><?xml version="1.0" encoding="utf-8"?>
+<ds:datastoreItem xmlns:ds="http://schemas.openxmlformats.org/officeDocument/2006/customXml" ds:itemID="{1EFFF01E-6DF4-4530-B663-FF4BD91444A6}">
+  <ds:schemaRefs>
+    <ds:schemaRef ds:uri="11e45801-bee2-4eee-abb6-7fc01a896634"/>
+    <ds:schemaRef ds:uri="http://schemas.microsoft.com/office/2006/documentManagement/types"/>
+    <ds:schemaRef ds:uri="http://www.w3.org/XML/1998/namespace"/>
+    <ds:schemaRef ds:uri="http://schemas.microsoft.com/office/2006/metadata/properties"/>
+    <ds:schemaRef ds:uri="http://purl.org/dc/terms/"/>
+    <ds:schemaRef ds:uri="http://purl.org/dc/elements/1.1/"/>
+    <ds:schemaRef ds:uri="http://schemas.microsoft.com/office/infopath/2007/PartnerControls"/>
+    <ds:schemaRef ds:uri="http://schemas.openxmlformats.org/package/2006/metadata/core-properties"/>
+    <ds:schemaRef ds:uri="http://purl.org/dc/dcmitype/"/>
+  </ds:schemaRefs>
+</ds:datastoreItem>
 </file>
 
-<file path=customXml/itemProps1.xml><?xml version="1.0" encoding="utf-8"?>
+<file path=customXml/itemProps3.xml><?xml version="1.0" encoding="utf-8"?>
 <ds:datastoreItem xmlns:ds="http://schemas.openxmlformats.org/officeDocument/2006/customXml" ds:itemID="{CB7AAD6B-2CD1-4FD9-A228-72630DF2E75E}">
   <ds:schemaRefs>
     <ds:schemaRef ds:uri="http://schemas.microsoft.com/office/2006/metadata/contentType"/>
@@ -23255,28 +22319,4 @@
     <ds:schemaRef ds:uri="http://schemas.microsoft.com/internal/obd"/>
   </ds:schemaRefs>
 </ds:datastoreItem>
-</file>
-
-<file path=customXml/itemProps2.xml><?xml version="1.0" encoding="utf-8"?>
-<ds:datastoreItem xmlns:ds="http://schemas.openxmlformats.org/officeDocument/2006/customXml" ds:itemID="{B94EBF72-05B3-4092-B058-100DE54983B2}">
-  <ds:schemaRefs>
-    <ds:schemaRef ds:uri="http://schemas.microsoft.com/sharepoint/v3/contenttype/forms"/>
-  </ds:schemaRefs>
-</ds:datastoreItem>
-</file>
-
-<file path=customXml/itemProps3.xml><?xml version="1.0" encoding="utf-8"?>
-<ds:datastoreItem xmlns:ds="http://schemas.openxmlformats.org/officeDocument/2006/customXml" ds:itemID="{1EFFF01E-6DF4-4530-B663-FF4BD91444A6}">
-  <ds:schemaRefs>
-    <ds:schemaRef ds:uri="11e45801-bee2-4eee-abb6-7fc01a896634"/>
-    <ds:schemaRef ds:uri="http://schemas.microsoft.com/office/2006/documentManagement/types"/>
-    <ds:schemaRef ds:uri="http://www.w3.org/XML/1998/namespace"/>
-    <ds:schemaRef ds:uri="http://schemas.microsoft.com/office/2006/metadata/properties"/>
-    <ds:schemaRef ds:uri="http://purl.org/dc/terms/"/>
-    <ds:schemaRef ds:uri="http://purl.org/dc/elements/1.1/"/>
-    <ds:schemaRef ds:uri="http://schemas.microsoft.com/office/infopath/2007/PartnerControls"/>
-    <ds:schemaRef ds:uri="http://schemas.openxmlformats.org/package/2006/metadata/core-properties"/>
-    <ds:schemaRef ds:uri="http://purl.org/dc/dcmitype/"/>
-  </ds:schemaRefs>
-</ds:datastoreItem>
 </file>